--- a/PPTs/L8-Exercises ANS.pptx
+++ b/PPTs/L8-Exercises ANS.pptx
@@ -846,7 +846,7 @@
           <a:p>
             <a:r>
               <a:rPr lang="en-GB" dirty="0"/>
-              <a:t>The virtual page number is 3 with a page offset of 0x374. Looking up page table entry for virtual page 3, we see that the page is resident in memory (i.e. valid bit = 1) and lives in physical page 2, so the corresponding physical address is (2&lt;</a:t>
+              <a:t>For 0xF74, the virtual page number is 3 with a page offset of 0x374. Looking up page table entry for virtual page 3, we see that the page is resident in memory (i.e. valid bit = 1) and lives in physical page 2, so the corresponding physical address is (2 &lt;&lt; 10) + 0x374 = 0x800 + 0x374.</a:t>
             </a:r>
           </a:p>
           <a:p>
@@ -883,7 +883,7 @@
                 </a:solidFill>
                 <a:latin typeface="Gill Sans Light"/>
               </a:rPr>
-              <a:t>01</a:t>
+              <a:t>10</a:t>
             </a:r>
             <a:r>
               <a:rPr lang="en-GB" dirty="0">
@@ -898,7 +898,7 @@
               <a:rPr lang="en-GB" dirty="0">
                 <a:latin typeface="Gill Sans Light"/>
               </a:rPr>
-              <a:t> (binary) = 0x774</a:t>
+              <a:t> (binary) = 0xB74</a:t>
             </a:r>
           </a:p>
           <a:p>
@@ -984,7 +984,7 @@
                 <a:effectLst/>
                 <a:latin typeface="KaTeX_Main"/>
               </a:rPr>
-              <a:t>2048=2112048=211</a:t>
+              <a:t>2048 = 2^11. </a:t>
             </a:r>
             <a:r>
               <a:rPr lang="en-GB" b="0" i="0" dirty="0">
@@ -1058,13 +1058,13 @@
           <a:p>
             <a:r>
               <a:rPr lang="en-GB" dirty="0"/>
-              <a:t>a Resident</a:t>
+              <a:t>Working set = 256 KB / 4 KB = 64 pages, so at least 64 TLB entries. Four processes x 256 KB = 1 MB aggregate working set; with less than 1 MB of physical memory the system thrashes (disk busy, CPU idle).</a:t>
             </a:r>
           </a:p>
           <a:p>
             <a:r>
               <a:rPr lang="en-GB" dirty="0"/>
-              <a:t>Set Size (RSS) of 512MB and a </a:t>
+              <a:t/>
             </a:r>
             <a:endParaRPr lang="en-SE" dirty="0"/>
           </a:p>
@@ -3838,7 +3838,7 @@
           <a:p>
             <a:r>
               <a:rPr lang="en-GB" dirty="0"/>
-              <a:t>Q. Paging</a:t>
+              <a:t>Q6. Paging: Multi-level Page Table</a:t>
             </a:r>
             <a:endParaRPr lang="en-SE" dirty="0"/>
           </a:p>
@@ -3931,7 +3931,7 @@
             <a:pPr lvl="1"/>
             <a:r>
               <a:rPr lang="en-GB" dirty="0"/>
-              <a:t>11 bits: Level 1 page table index</a:t>
+              <a:t>11 bits: Level 3 page table index</a:t>
             </a:r>
           </a:p>
           <a:p>
@@ -3945,7 +3945,7 @@
             <a:pPr lvl="1"/>
             <a:r>
               <a:rPr lang="en-GB" dirty="0"/>
-              <a:t>11 bits: Level 3 page table index</a:t>
+              <a:t>11 bits: Level 1 page table index</a:t>
             </a:r>
           </a:p>
           <a:p>
@@ -4022,7 +4022,7 @@
                           <a:latin typeface="Arial" panose="020B0604020202020204" pitchFamily="34" charset="0"/>
                           <a:cs typeface="Arial" panose="020B0604020202020204" pitchFamily="34" charset="0"/>
                         </a:rPr>
-                        <a:t>L3 PT index: 11 bits</a:t>
+                        <a:t>L1 PT index: 11 bits</a:t>
                       </a:r>
                       <a:endParaRPr lang="en-SE" dirty="0">
                         <a:latin typeface="Arial" panose="020B0604020202020204" pitchFamily="34" charset="0"/>
@@ -4064,7 +4064,7 @@
                           <a:latin typeface="Arial" panose="020B0604020202020204" pitchFamily="34" charset="0"/>
                           <a:cs typeface="Arial" panose="020B0604020202020204" pitchFamily="34" charset="0"/>
                         </a:rPr>
-                        <a:t>L1 PT index: 11 bits</a:t>
+                        <a:t>L3 PT index: 11 bits</a:t>
                       </a:r>
                       <a:endParaRPr lang="en-SE" dirty="0">
                         <a:latin typeface="Arial" panose="020B0604020202020204" pitchFamily="34" charset="0"/>
@@ -4531,7 +4531,7 @@
           <a:p>
             <a:r>
               <a:rPr lang="en-GB" dirty="0"/>
-              <a:t>Q. Paging</a:t>
+              <a:t>Q7. Paging: Memory Accesses and TLB</a:t>
             </a:r>
             <a:endParaRPr lang="en-SE" dirty="0"/>
           </a:p>
@@ -4562,7 +4562,7 @@
           <a:p>
             <a:r>
               <a:rPr lang="en-GB" dirty="0"/>
-              <a:t>Q: Without a cache or TLB, how many memory operations are required to read or write a single 32-bit word?</a:t>
+              <a:t>Q: Without a cache or TLB, how many memory operations are required to read or write a single 32-bit word (assume the 3-level page table from the previous question)?</a:t>
             </a:r>
           </a:p>
           <a:p>
@@ -4924,7 +4924,7 @@
           <a:p>
             <a:r>
               <a:rPr lang="en-GB" dirty="0"/>
-              <a:t>Q. Paging</a:t>
+              <a:t>Q8. Paging: Working Set, TLB and Thrashing</a:t>
             </a:r>
             <a:endParaRPr lang="en-SE" dirty="0"/>
           </a:p>
@@ -4972,13 +4972,13 @@
           <a:p>
             <a:r>
               <a:rPr lang="en-GB" dirty="0"/>
-              <a:t>ANS: A process has a working set size of 256KB which means that the working set fits in 256KB/4KB=64 pages. This means our TLB should have 64 entries. If you have more entries, then performance will increase since the process often has changing working sets, and it should be able to store more in the TLB. If it has less, then it can’t easily translate the addresses in the working set and performance will suffer.</a:t>
+              <a:t>ANS: A process has a working set size of 256KB which means that the working set fits in 256KB/4KB=64 pages. This means our TLB should have 64 entries. If you have more entries, then performance will increase since the process often has changing working sets, and it should be able to store more in the TLB. If it has fewer entries, then it can’t easily translate the addresses in the working set and performance will suffer.</a:t>
             </a:r>
           </a:p>
           <a:p>
             <a:r>
               <a:rPr lang="en-GB" dirty="0"/>
-              <a:t>2. Suppose you run some benchmarks on the system and you see that the system is utilizing over 99% of its paging disk IO capacity, but only 10% of its CPU. What is a combination of the of disk space and memory size that can cause this to occur? Assume you have TLB entries equal to the answer from the previous part.</a:t>
+              <a:t>2. Suppose you run some benchmarks on the system and you see that the system is utilizing over 99% of its paging disk IO capacity, but only 10% of its CPU. What is a combination of disk space and memory size that can cause this to occur? Assume you have TLB entries equal to the answer from the previous part.</a:t>
             </a:r>
           </a:p>
           <a:p>
@@ -5837,7 +5837,7 @@
           <a:p>
             <a:r>
               <a:rPr lang="en-GB" dirty="0"/>
-              <a:t>Q1. Page Replacement</a:t>
+              <a:t>Q3. Page Replacement</a:t>
             </a:r>
             <a:endParaRPr lang="en-SE" dirty="0"/>
           </a:p>
@@ -6712,7 +6712,7 @@
           <a:p>
             <a:r>
               <a:rPr lang="en-GB" dirty="0"/>
-              <a:t>Q1. Page Replacement ANS</a:t>
+              <a:t>Q3. Page Replacement ANS</a:t>
             </a:r>
             <a:endParaRPr lang="en-SE" dirty="0"/>
           </a:p>
@@ -7716,7 +7716,7 @@
               <a:rPr lang="en-GB" sz="1600" b="0" dirty="0">
                 <a:latin typeface="+mj-lt"/>
               </a:rPr>
-              <a:t>(When referencing 4 and 6, you can replace any page, as long it page 1 is not replaced, since only it will be referenced again in the future)</a:t>
+              <a:t>(When referencing 4 and 6, you can replace any page, as long as page 1 is not replaced, since only it will be referenced again in the future)</a:t>
             </a:r>
             <a:endParaRPr lang="en-SE" sz="1600" b="0" dirty="0">
               <a:latin typeface="+mj-lt"/>
@@ -9582,7 +9582,7 @@
           <a:p>
             <a:r>
               <a:rPr lang="en-GB" dirty="0"/>
-              <a:t>Q2. Page Replacement</a:t>
+              <a:t>Q4. Page Replacement</a:t>
             </a:r>
             <a:endParaRPr lang="en-SE" dirty="0"/>
           </a:p>
@@ -10875,7 +10875,7 @@
           <a:p>
             <a:r>
               <a:rPr lang="en-GB" dirty="0"/>
-              <a:t>Q2. Page Replacement ANS</a:t>
+              <a:t>Q4. Page Replacement ANS</a:t>
             </a:r>
             <a:endParaRPr lang="en-SE" dirty="0"/>
           </a:p>
@@ -15125,7 +15125,7 @@
           <a:p>
             <a:r>
               <a:rPr lang="en-GB" dirty="0"/>
-              <a:t>Q2. Page Replacement References</a:t>
+              <a:t>Q4. Page Replacement References</a:t>
             </a:r>
             <a:endParaRPr lang="en-SE" dirty="0"/>
           </a:p>
@@ -15276,7 +15276,7 @@
           <a:p>
             <a:r>
               <a:rPr lang="en-GB" dirty="0"/>
-              <a:t>Q. Paging</a:t>
+              <a:t>Q5. Paging: Address Translation</a:t>
             </a:r>
             <a:endParaRPr lang="en-SE" dirty="0"/>
           </a:p>
@@ -15320,13 +15320,13 @@
               <a:rPr lang="en-GB">
                 <a:latin typeface="Gill Sans Light"/>
               </a:rPr>
-              <a:t>virtual memory address </a:t>
+              <a:t>virtual memory addresses </a:t>
             </a:r>
             <a:r>
               <a:rPr lang="en-GB" dirty="0">
                 <a:latin typeface="Gill Sans Light"/>
               </a:rPr>
-              <a:t>0xF74, 0x374?</a:t>
+              <a:t>0xF74 and 0x374?</a:t>
             </a:r>
           </a:p>
           <a:p>
@@ -15569,20 +15569,20 @@
               <a:rPr lang="en-GB" dirty="0">
                 <a:latin typeface="Gill Sans Light"/>
               </a:rPr>
-              <a:t>Entry for VPN 00 (0 in decimal): Valid bit = 0.</a:t>
+              <a:t>Entry for VPN 00 (0 in decimal): Valid bit = 0,</a:t>
             </a:r>
             <a:r>
               <a:rPr lang="en-GB" b="0" i="0" dirty="0">
                 <a:effectLst/>
                 <a:latin typeface="Gill Sans Light"/>
               </a:rPr>
-              <a:t> hence the page is not in physical memory</a:t>
+              <a:t> so the page is not in physical memory</a:t>
             </a:r>
             <a:r>
               <a:rPr lang="en-GB" dirty="0">
                 <a:latin typeface="Gill Sans Light"/>
               </a:rPr>
-              <a:t>, there will be a page fault and OS will bring the page into memory. The current PPN is not valid and shown as “/”. </a:t>
+              <a:t>; there will be a page fault and OS will bring the page into memory. The current PPN is not valid and shown as “/”. </a:t>
             </a:r>
           </a:p>
         </p:txBody>
